--- a/docs/SUNUM-Restoran-POS-v1.1.0.pptx
+++ b/docs/SUNUM-Restoran-POS-v1.1.0.pptx
@@ -3453,7 +3453,7 @@
                 </a:solidFill>
                 <a:latin typeface="Calibri"/>
               </a:rPr>
-              <a:t>İlhan AVCI  |  220357008</a:t>
+              <a:t>İlhan AVCİ  |  220357008</a:t>
             </a:r>
           </a:p>
         </p:txBody>
@@ -13048,7 +13048,7 @@
                 </a:solidFill>
                 <a:latin typeface="Calibri"/>
               </a:rPr>
-              <a:t>İlhan AVCI  ·  220357008</a:t>
+              <a:t>İlhan AVCİ  ·  220357008</a:t>
             </a:r>
           </a:p>
         </p:txBody>
